--- a/Libraries exploration through a basic multiplatform chatbot app.pptx
+++ b/Libraries exploration through a basic multiplatform chatbot app.pptx
@@ -6996,7 +6996,7 @@
           <a:p>
             <a:r>
               <a:rPr lang="en-US" dirty="0"/>
-              <a:t>Thank you</a:t>
+              <a:t>Thank you!</a:t>
             </a:r>
           </a:p>
         </p:txBody>
@@ -7393,8 +7393,8 @@
         </p:nvSpPr>
         <p:spPr>
           <a:xfrm>
-            <a:off x="4187825" y="859066"/>
-            <a:ext cx="7561263" cy="5139869"/>
+            <a:off x="4187825" y="1238657"/>
+            <a:ext cx="7561263" cy="4380686"/>
           </a:xfrm>
         </p:spPr>
         <p:txBody>
@@ -7481,23 +7481,6 @@
             <a:r>
               <a:rPr lang="en-CA" sz="2400" dirty="0"/>
               <a:t>App Demo</a:t>
-            </a:r>
-            <a:endParaRPr lang="en-CA" sz="2400" noProof="0" dirty="0"/>
-          </a:p>
-          <a:p>
-            <a:pPr marL="514350" indent="-514350" algn="l">
-              <a:buClr>
-                <a:schemeClr val="accent2">
-                  <a:lumMod val="60000"/>
-                  <a:lumOff val="40000"/>
-                </a:schemeClr>
-              </a:buClr>
-              <a:buFont typeface="+mj-lt"/>
-              <a:buAutoNum type="arabicPeriod"/>
-            </a:pPr>
-            <a:r>
-              <a:rPr lang="en-CA" sz="2400" dirty="0"/>
-              <a:t>Conclusion</a:t>
             </a:r>
           </a:p>
           <a:p>
@@ -8152,7 +8135,7 @@
                 <a:latin typeface="Roboto" panose="02000000000000000000" pitchFamily="2" charset="0"/>
                 <a:ea typeface="Roboto" panose="02000000000000000000" pitchFamily="2" charset="0"/>
               </a:rPr>
-              <a:t>Use Dart, Developed by Google</a:t>
+              <a:t>Use Dart, developed by Google</a:t>
             </a:r>
           </a:p>
           <a:p>
@@ -8202,7 +8185,7 @@
                 <a:latin typeface="Roboto" panose="02000000000000000000" pitchFamily="2" charset="0"/>
                 <a:ea typeface="Roboto" panose="02000000000000000000" pitchFamily="2" charset="0"/>
               </a:rPr>
-              <a:t>Use a widget approach for component that implement both Google </a:t>
+              <a:t>Use a widget approach for component that implements both Google </a:t>
             </a:r>
             <a:r>
               <a:rPr lang="en-US" sz="2000" dirty="0">
@@ -8263,7 +8246,7 @@
                 <a:latin typeface="Roboto" panose="02000000000000000000" pitchFamily="2" charset="0"/>
                 <a:ea typeface="Roboto" panose="02000000000000000000" pitchFamily="2" charset="0"/>
               </a:rPr>
-              <a:t>Use C# and XAML, Developed by Microsoft</a:t>
+              <a:t>Use C# and XAML, developed by Microsoft</a:t>
             </a:r>
           </a:p>
           <a:p>
@@ -8288,7 +8271,7 @@
                 <a:latin typeface="Roboto" panose="02000000000000000000" pitchFamily="2" charset="0"/>
                 <a:ea typeface="Roboto" panose="02000000000000000000" pitchFamily="2" charset="0"/>
               </a:rPr>
-              <a:t>Support mobile (iOS, Android), Desktop (Windows, macOS)</a:t>
+              <a:t>Support mobile (iOS, Android), desktop (Windows, macOS)</a:t>
             </a:r>
           </a:p>
           <a:p>
@@ -8673,7 +8656,7 @@
                 <a:latin typeface="Roboto" panose="02000000000000000000" pitchFamily="2" charset="0"/>
                 <a:ea typeface="Roboto" panose="02000000000000000000" pitchFamily="2" charset="0"/>
               </a:rPr>
-              <a:t>Use Kotlin, Developed by </a:t>
+              <a:t>Use Kotlin, developed by </a:t>
             </a:r>
             <a:r>
               <a:rPr lang="en-CA" sz="2000" dirty="0" err="1">
@@ -8784,7 +8767,7 @@
                 <a:latin typeface="Roboto" panose="02000000000000000000" pitchFamily="2" charset="0"/>
                 <a:ea typeface="Roboto" panose="02000000000000000000" pitchFamily="2" charset="0"/>
               </a:rPr>
-              <a:t>Use JS/TS, Developed by </a:t>
+              <a:t>Use JS/TS, developed by </a:t>
             </a:r>
             <a:r>
               <a:rPr lang="en-CA" sz="2000" dirty="0" err="1">
@@ -9241,7 +9224,7 @@
                 <a:latin typeface="Roboto" panose="02000000000000000000" pitchFamily="2" charset="0"/>
                 <a:ea typeface="Roboto" panose="02000000000000000000" pitchFamily="2" charset="0"/>
               </a:rPr>
-              <a:t>Use Rust and JS/TS, Developed by Tauri Contributors</a:t>
+              <a:t>Use Rust and JS/TS, developed by Tauri Contributors</a:t>
             </a:r>
           </a:p>
           <a:p>
@@ -9291,21 +9274,7 @@
                 <a:latin typeface="Roboto" panose="02000000000000000000" pitchFamily="2" charset="0"/>
                 <a:ea typeface="Roboto" panose="02000000000000000000" pitchFamily="2" charset="0"/>
               </a:rPr>
-              <a:t>Can use any JS/TS web UI framework. It use a native </a:t>
-            </a:r>
-            <a:r>
-              <a:rPr lang="en-CA" sz="2000" dirty="0" err="1">
-                <a:latin typeface="Roboto" panose="02000000000000000000" pitchFamily="2" charset="0"/>
-                <a:ea typeface="Roboto" panose="02000000000000000000" pitchFamily="2" charset="0"/>
-              </a:rPr>
-              <a:t>webview</a:t>
-            </a:r>
-            <a:r>
-              <a:rPr lang="en-CA" sz="2000" dirty="0">
-                <a:latin typeface="Roboto" panose="02000000000000000000" pitchFamily="2" charset="0"/>
-                <a:ea typeface="Roboto" panose="02000000000000000000" pitchFamily="2" charset="0"/>
-              </a:rPr>
-              <a:t> approach for all platform, that reduce the size of the app significantly.</a:t>
+              <a:t>Can use any JS/TS web UI framework. It use a native web view approach for all platform, that reduce the size of the app significantly.</a:t>
             </a:r>
           </a:p>
           <a:p>
@@ -9330,7 +9299,7 @@
                 <a:latin typeface="Roboto" panose="02000000000000000000" pitchFamily="2" charset="0"/>
                 <a:ea typeface="Roboto" panose="02000000000000000000" pitchFamily="2" charset="0"/>
               </a:rPr>
-              <a:t>The common API for native integration is in Rust. But can run any language with there sidecar feature.</a:t>
+              <a:t>The common API for native integration is in Rust. But can run any language with their sidecar feature.</a:t>
             </a:r>
           </a:p>
           <a:p>
@@ -9636,8 +9605,8 @@
         </p:nvSpPr>
         <p:spPr>
           <a:xfrm>
-            <a:off x="5094513" y="1534994"/>
-            <a:ext cx="6444047" cy="1089016"/>
+            <a:off x="5094511" y="1394955"/>
+            <a:ext cx="6444047" cy="1369093"/>
           </a:xfrm>
           <a:prstGeom prst="rect">
             <a:avLst/>
@@ -9835,7 +9804,7 @@
                 <a:latin typeface="Roboto" panose="02000000000000000000" pitchFamily="2" charset="0"/>
                 <a:ea typeface="Roboto" panose="02000000000000000000" pitchFamily="2" charset="0"/>
               </a:rPr>
-              <a:t> with </a:t>
+              <a:t> and </a:t>
             </a:r>
             <a:r>
               <a:rPr lang="en-CA" sz="2000" noProof="0" dirty="0" err="1">
@@ -9856,30 +9825,48 @@
             </a:endParaRPr>
           </a:p>
           <a:p>
-            <a:pPr lvl="0">
+            <a:pPr marL="285750" lvl="0" indent="-285750">
               <a:lnSpc>
                 <a:spcPct val="130000"/>
               </a:lnSpc>
               <a:spcBef>
                 <a:spcPts val="0"/>
               </a:spcBef>
+              <a:buFont typeface="Arial" panose="020B0604020202020204" pitchFamily="34" charset="0"/>
+              <a:buChar char="•"/>
             </a:pPr>
             <a:r>
               <a:rPr lang="en-CA" sz="1400" noProof="0" dirty="0">
                 <a:latin typeface="Roboto" panose="02000000000000000000" pitchFamily="2" charset="0"/>
                 <a:ea typeface="Roboto" panose="02000000000000000000" pitchFamily="2" charset="0"/>
               </a:rPr>
-              <a:t>Fast and easy to use framework to build API in python.</a:t>
-            </a:r>
-          </a:p>
-          <a:p>
-            <a:pPr lvl="0">
+              <a:t>Very fast and easy to use framework to build API in python build on Starlette and </a:t>
+            </a:r>
+            <a:r>
+              <a:rPr lang="en-CA" sz="1400" noProof="0" dirty="0" err="1">
+                <a:latin typeface="Roboto" panose="02000000000000000000" pitchFamily="2" charset="0"/>
+                <a:ea typeface="Roboto" panose="02000000000000000000" pitchFamily="2" charset="0"/>
+              </a:rPr>
+              <a:t>Pydantic</a:t>
+            </a:r>
+            <a:r>
+              <a:rPr lang="en-CA" sz="1400" noProof="0" dirty="0">
+                <a:latin typeface="Roboto" panose="02000000000000000000" pitchFamily="2" charset="0"/>
+                <a:ea typeface="Roboto" panose="02000000000000000000" pitchFamily="2" charset="0"/>
+              </a:rPr>
+              <a:t>.</a:t>
+            </a:r>
+          </a:p>
+          <a:p>
+            <a:pPr marL="285750" lvl="0" indent="-285750">
               <a:lnSpc>
                 <a:spcPct val="130000"/>
               </a:lnSpc>
               <a:spcBef>
                 <a:spcPts val="0"/>
               </a:spcBef>
+              <a:buFont typeface="Arial" panose="020B0604020202020204" pitchFamily="34" charset="0"/>
+              <a:buChar char="•"/>
             </a:pPr>
             <a:r>
               <a:rPr lang="en-CA" sz="1400" dirty="0">
@@ -9995,8 +9982,8 @@
         </p:nvSpPr>
         <p:spPr>
           <a:xfrm>
-            <a:off x="5094511" y="3206877"/>
-            <a:ext cx="6444047" cy="1089016"/>
+            <a:off x="5094510" y="3066838"/>
+            <a:ext cx="6444047" cy="1369093"/>
           </a:xfrm>
           <a:prstGeom prst="rect">
             <a:avLst/>
@@ -10208,13 +10195,15 @@
             </a:r>
           </a:p>
           <a:p>
-            <a:pPr lvl="0">
+            <a:pPr marL="285750" lvl="0" indent="-285750">
               <a:lnSpc>
                 <a:spcPct val="130000"/>
               </a:lnSpc>
               <a:spcBef>
                 <a:spcPts val="0"/>
               </a:spcBef>
+              <a:buFont typeface="Arial" panose="020B0604020202020204" pitchFamily="34" charset="0"/>
+              <a:buChar char="•"/>
             </a:pPr>
             <a:r>
               <a:rPr lang="en-CA" sz="1400" noProof="0" dirty="0">
@@ -10229,13 +10218,15 @@
             </a:endParaRPr>
           </a:p>
           <a:p>
-            <a:pPr lvl="0">
+            <a:pPr marL="285750" lvl="0" indent="-285750">
               <a:lnSpc>
                 <a:spcPct val="130000"/>
               </a:lnSpc>
               <a:spcBef>
                 <a:spcPts val="0"/>
               </a:spcBef>
+              <a:buFont typeface="Arial" panose="020B0604020202020204" pitchFamily="34" charset="0"/>
+              <a:buChar char="•"/>
             </a:pPr>
             <a:r>
               <a:rPr lang="en-CA" sz="1400" noProof="0" dirty="0">
@@ -10529,13 +10520,15 @@
             </a:endParaRPr>
           </a:p>
           <a:p>
-            <a:pPr lvl="0">
+            <a:pPr marL="285750" lvl="0" indent="-285750">
               <a:lnSpc>
                 <a:spcPct val="130000"/>
               </a:lnSpc>
               <a:spcBef>
                 <a:spcPts val="0"/>
               </a:spcBef>
+              <a:buFont typeface="Arial" panose="020B0604020202020204" pitchFamily="34" charset="0"/>
+              <a:buChar char="•"/>
             </a:pPr>
             <a:r>
               <a:rPr lang="en-CA" sz="1400" noProof="0" dirty="0">
@@ -10546,13 +10539,15 @@
             </a:r>
           </a:p>
           <a:p>
-            <a:pPr lvl="0">
+            <a:pPr marL="285750" lvl="0" indent="-285750">
               <a:lnSpc>
                 <a:spcPct val="130000"/>
               </a:lnSpc>
               <a:spcBef>
                 <a:spcPts val="0"/>
               </a:spcBef>
+              <a:buFont typeface="Arial" panose="020B0604020202020204" pitchFamily="34" charset="0"/>
+              <a:buChar char="•"/>
             </a:pPr>
             <a:r>
               <a:rPr lang="en-CA" sz="1400" noProof="0" dirty="0" err="1">
@@ -10568,18 +10563,24 @@
               </a:rPr>
               <a:t> is a super performant type checker and language server for Python</a:t>
             </a:r>
-            <a:br>
+          </a:p>
+          <a:p>
+            <a:pPr marL="285750" lvl="0" indent="-285750">
+              <a:lnSpc>
+                <a:spcPct val="130000"/>
+              </a:lnSpc>
+              <a:spcBef>
+                <a:spcPts val="0"/>
+              </a:spcBef>
+              <a:buFont typeface="Arial" panose="020B0604020202020204" pitchFamily="34" charset="0"/>
+              <a:buChar char="•"/>
+            </a:pPr>
+            <a:r>
               <a:rPr lang="en-CA" sz="1400" noProof="0" dirty="0">
                 <a:latin typeface="Roboto" panose="02000000000000000000" pitchFamily="2" charset="0"/>
                 <a:ea typeface="Roboto" panose="02000000000000000000" pitchFamily="2" charset="0"/>
               </a:rPr>
-            </a:br>
-            <a:r>
-              <a:rPr lang="en-CA" sz="1400" noProof="0" dirty="0">
-                <a:latin typeface="Roboto" panose="02000000000000000000" pitchFamily="2" charset="0"/>
-                <a:ea typeface="Roboto" panose="02000000000000000000" pitchFamily="2" charset="0"/>
-              </a:rPr>
-              <a:t>Both tools are made in Rust for beater performance.</a:t>
+              <a:t>Both tools are made in Rust for better performance.</a:t>
             </a:r>
           </a:p>
         </p:txBody>
@@ -10734,8 +10735,8 @@
         </p:nvSpPr>
         <p:spPr>
           <a:xfrm>
-            <a:off x="4707115" y="83016"/>
-            <a:ext cx="6594123" cy="6832640"/>
+            <a:off x="5154964" y="181957"/>
+            <a:ext cx="6594123" cy="6494085"/>
           </a:xfrm>
           <a:prstGeom prst="rect">
             <a:avLst/>
@@ -10952,7 +10953,7 @@
                 <a:latin typeface="Roboto" panose="02000000000000000000" pitchFamily="2" charset="0"/>
                 <a:ea typeface="Roboto" panose="02000000000000000000" pitchFamily="2" charset="0"/>
               </a:rPr>
-              <a:t> for beater integration with GitHub Copilot</a:t>
+              <a:t> for better integration with GitHub Copilot</a:t>
             </a:r>
           </a:p>
           <a:p>
@@ -11002,7 +11003,7 @@
                 <a:latin typeface="Roboto" panose="02000000000000000000" pitchFamily="2" charset="0"/>
                 <a:ea typeface="Roboto" panose="02000000000000000000" pitchFamily="2" charset="0"/>
               </a:rPr>
-              <a:t>I used Claude Opus 4.5 model (4.6 for opus and sonnet are now available) in the 3 mode (agent, ask and plan).</a:t>
+              <a:t>I used Claude Opus 4.5 model in the 3 modes (agent, ask and plan).</a:t>
             </a:r>
           </a:p>
           <a:p>
@@ -11141,7 +11142,7 @@
                 <a:latin typeface="Roboto" panose="02000000000000000000" pitchFamily="2" charset="0"/>
                 <a:ea typeface="Roboto" panose="02000000000000000000" pitchFamily="2" charset="0"/>
               </a:rPr>
-              <a:t> (faster language server then </a:t>
+              <a:t> (faster language server than </a:t>
             </a:r>
             <a:r>
               <a:rPr lang="en-CA" sz="2000" dirty="0" err="1">
@@ -11155,7 +11156,7 @@
                 <a:latin typeface="Roboto" panose="02000000000000000000" pitchFamily="2" charset="0"/>
                 <a:ea typeface="Roboto" panose="02000000000000000000" pitchFamily="2" charset="0"/>
               </a:rPr>
-              <a:t>, also work beater with </a:t>
+              <a:t>, also work better with </a:t>
             </a:r>
             <a:r>
               <a:rPr lang="en-CA" sz="2000" dirty="0" err="1">
